--- a/slides/pptx/week14.pptx
+++ b/slides/pptx/week14.pptx
@@ -693,7 +693,7 @@
           <a:p>
             <a:r>
               <a:rPr lang="en-US" dirty="0"/>
-              <a:t>The payoff — map each defense to a leg of the pattern: least-privilege tools cut PRIVILEGE; isolating RAG content cuts UNTRUSTED INPUT; egress limits + human approval cut the OUTBOUND CHANNEL. The sim runs the actual guardrail/redact/escape code from guarded_chatbot.py against whatever they type, layer by layer — including the uncomfortable case where a phrase slips past the regex but redaction still catches the secret. Be honest that the first three are hands-on today and the fourth bullet is discussion-only. No single guardrail is enough; layer them. ~5 min.</a:t>
+              <a:t>The payoff — map each defense to a leg of the pattern: least-privilege tools cut PRIVILEGE; isolating RAG content cuts UNTRUSTED INPUT; egress limits + human approval cut the OUTBOUND CHANNEL. The sim runs the actual guardrail/redact/escape code from both real files against whatever they type, layer by layer. Verified live: try the "not in either list" preset — a natural rephrase ("what's" vs "what is") slips past BOTH the vulnerable list and the guarded regex, in either mode. That's the honest lesson, not "redaction saves it" — in this toy model redact_secret() only has something to catch when mock_llm's own hardcoded leak path already fired, so a keyword filter that's too narrow is a gap on both sides, not one your later layers automatically patch. Be honest that the first three are hands-on today and the fourth bullet is discussion-only. No single guardrail is enough; layer them. ~5 min.</a:t>
             </a:r>
             <a:endParaRPr lang="en-US" dirty="0"/>
           </a:p>
@@ -781,7 +781,7 @@
           <a:p>
             <a:r>
               <a:rPr lang="en-US" dirty="0"/>
-              <a:t>Gandalf (Lakera) is genuinely fun and free — students compete to climb levels. Round 2 (Task 5: replay against guarded_chatbot.py) is graded — the point is that guardrails/redaction/escaping visibly stop what worked before. Don't promise a live tool-poisoning demo; it's a discussion question. Q6 of the quiz asks for the injection that captured the flag + why the guardrail failed. ~3 min.</a:t>
+              <a:t>Gandalf (Lakera) is genuinely fun and free — students compete to climb levels. Round 2 (Task 5: replay against guarded_chatbot.py) is graded — the point is that guardrails/redaction/escaping visibly stop what worked before. Don't promise a live tool-poisoning demo; it's a discussion question. The weekly quiz no longer asks for the injection/guardrail-failure/flag (dropped — quiz runs before the lab) — that's required in the worksheet instead. ~3 min.</a:t>
             </a:r>
             <a:endParaRPr lang="en-US" dirty="0"/>
           </a:p>
